--- a/Chức năng của giao diện trên Unity.pptx
+++ b/Chức năng của giao diện trên Unity.pptx
@@ -7,7 +7,10 @@
   <p:sldIdLst>
     <p:sldId id="256" r:id="rId2"/>
     <p:sldId id="257" r:id="rId3"/>
-    <p:sldId id="258" r:id="rId4"/>
+    <p:sldId id="259" r:id="rId4"/>
+    <p:sldId id="258" r:id="rId5"/>
+    <p:sldId id="260" r:id="rId6"/>
+    <p:sldId id="261" r:id="rId7"/>
   </p:sldIdLst>
   <p:sldSz cx="12192000" cy="6858000"/>
   <p:notesSz cx="6858000" cy="9144000"/>
@@ -397,7 +400,7 @@
           <a:p>
             <a:fld id="{E80C50CD-E178-4744-9B35-B2F624D6C5E9}" type="datetimeFigureOut">
               <a:rPr lang="en-US" smtClean="0"/>
-              <a:t>4/28/2025</a:t>
+              <a:t>4/30/2025</a:t>
             </a:fld>
             <a:endParaRPr lang="en-US"/>
           </a:p>
@@ -595,7 +598,7 @@
           <a:p>
             <a:fld id="{E80C50CD-E178-4744-9B35-B2F624D6C5E9}" type="datetimeFigureOut">
               <a:rPr lang="en-US" smtClean="0"/>
-              <a:t>4/28/2025</a:t>
+              <a:t>4/30/2025</a:t>
             </a:fld>
             <a:endParaRPr lang="en-US"/>
           </a:p>
@@ -803,7 +806,7 @@
           <a:p>
             <a:fld id="{E80C50CD-E178-4744-9B35-B2F624D6C5E9}" type="datetimeFigureOut">
               <a:rPr lang="en-US" smtClean="0"/>
-              <a:t>4/28/2025</a:t>
+              <a:t>4/30/2025</a:t>
             </a:fld>
             <a:endParaRPr lang="en-US"/>
           </a:p>
@@ -1053,7 +1056,7 @@
           <a:p>
             <a:fld id="{E80C50CD-E178-4744-9B35-B2F624D6C5E9}" type="datetimeFigureOut">
               <a:rPr lang="en-US" smtClean="0"/>
-              <a:t>4/28/2025</a:t>
+              <a:t>4/30/2025</a:t>
             </a:fld>
             <a:endParaRPr lang="en-US"/>
           </a:p>
@@ -1332,7 +1335,7 @@
           <a:p>
             <a:fld id="{E80C50CD-E178-4744-9B35-B2F624D6C5E9}" type="datetimeFigureOut">
               <a:rPr lang="en-US" smtClean="0"/>
-              <a:t>4/28/2025</a:t>
+              <a:t>4/30/2025</a:t>
             </a:fld>
             <a:endParaRPr lang="en-US"/>
           </a:p>
@@ -1649,7 +1652,7 @@
           <a:p>
             <a:fld id="{E80C50CD-E178-4744-9B35-B2F624D6C5E9}" type="datetimeFigureOut">
               <a:rPr lang="en-US" smtClean="0"/>
-              <a:t>4/28/2025</a:t>
+              <a:t>4/30/2025</a:t>
             </a:fld>
             <a:endParaRPr lang="en-US"/>
           </a:p>
@@ -2065,7 +2068,7 @@
           <a:p>
             <a:fld id="{E80C50CD-E178-4744-9B35-B2F624D6C5E9}" type="datetimeFigureOut">
               <a:rPr lang="en-US" smtClean="0"/>
-              <a:t>4/28/2025</a:t>
+              <a:t>4/30/2025</a:t>
             </a:fld>
             <a:endParaRPr lang="en-US"/>
           </a:p>
@@ -2206,7 +2209,7 @@
           <a:p>
             <a:fld id="{E80C50CD-E178-4744-9B35-B2F624D6C5E9}" type="datetimeFigureOut">
               <a:rPr lang="en-US" smtClean="0"/>
-              <a:t>4/28/2025</a:t>
+              <a:t>4/30/2025</a:t>
             </a:fld>
             <a:endParaRPr lang="en-US"/>
           </a:p>
@@ -2319,7 +2322,7 @@
           <a:p>
             <a:fld id="{E80C50CD-E178-4744-9B35-B2F624D6C5E9}" type="datetimeFigureOut">
               <a:rPr lang="en-US" smtClean="0"/>
-              <a:t>4/28/2025</a:t>
+              <a:t>4/30/2025</a:t>
             </a:fld>
             <a:endParaRPr lang="en-US"/>
           </a:p>
@@ -2636,7 +2639,7 @@
           <a:p>
             <a:fld id="{E80C50CD-E178-4744-9B35-B2F624D6C5E9}" type="datetimeFigureOut">
               <a:rPr lang="en-US" smtClean="0"/>
-              <a:t>4/28/2025</a:t>
+              <a:t>4/30/2025</a:t>
             </a:fld>
             <a:endParaRPr lang="en-US"/>
           </a:p>
@@ -2928,7 +2931,7 @@
           <a:p>
             <a:fld id="{E80C50CD-E178-4744-9B35-B2F624D6C5E9}" type="datetimeFigureOut">
               <a:rPr lang="en-US" smtClean="0"/>
-              <a:t>4/28/2025</a:t>
+              <a:t>4/30/2025</a:t>
             </a:fld>
             <a:endParaRPr lang="en-US"/>
           </a:p>
@@ -3168,7 +3171,7 @@
             <a:fld id="{E80C50CD-E178-4744-9B35-B2F624D6C5E9}" type="datetimeFigureOut">
               <a:rPr lang="en-US" smtClean="0"/>
               <a:pPr/>
-              <a:t>4/28/2025</a:t>
+              <a:t>4/30/2025</a:t>
             </a:fld>
             <a:endParaRPr lang="en-US"/>
           </a:p>
@@ -4173,6 +4176,346 @@
 <file path=ppt/slides/slide3.xml><?xml version="1.0" encoding="utf-8"?>
 <p:sld xmlns:a="http://schemas.openxmlformats.org/drawingml/2006/main" xmlns:r="http://schemas.openxmlformats.org/officeDocument/2006/relationships" xmlns:p="http://schemas.openxmlformats.org/presentationml/2006/main">
   <p:cSld>
+    <p:bg>
+      <p:bgPr>
+        <a:blipFill dpi="0" rotWithShape="1">
+          <a:blip r:embed="rId2">
+            <a:lum/>
+          </a:blip>
+          <a:srcRect/>
+          <a:stretch>
+            <a:fillRect t="-6000"/>
+          </a:stretch>
+        </a:blipFill>
+        <a:effectLst/>
+      </p:bgPr>
+    </p:bg>
+    <p:spTree>
+      <p:nvGrpSpPr>
+        <p:cNvPr id="1" name=""/>
+        <p:cNvGrpSpPr/>
+        <p:nvPr/>
+      </p:nvGrpSpPr>
+      <p:grpSpPr>
+        <a:xfrm>
+          <a:off x="0" y="0"/>
+          <a:ext cx="0" cy="0"/>
+          <a:chOff x="0" y="0"/>
+          <a:chExt cx="0" cy="0"/>
+        </a:xfrm>
+      </p:grpSpPr>
+      <p:grpSp>
+        <p:nvGrpSpPr>
+          <p:cNvPr id="4" name="Group 3">
+            <a:extLst>
+              <a:ext uri="{FF2B5EF4-FFF2-40B4-BE49-F238E27FC236}">
+                <a16:creationId xmlns:a16="http://schemas.microsoft.com/office/drawing/2014/main" id="{AC3DD675-7ADB-866C-D5FF-C454BF2AA299}"/>
+              </a:ext>
+            </a:extLst>
+          </p:cNvPr>
+          <p:cNvGrpSpPr/>
+          <p:nvPr/>
+        </p:nvGrpSpPr>
+        <p:grpSpPr>
+          <a:xfrm>
+            <a:off x="7263712" y="5272308"/>
+            <a:ext cx="3213100" cy="822343"/>
+            <a:chOff x="6570616" y="1885404"/>
+            <a:chExt cx="5310292" cy="3025262"/>
+          </a:xfrm>
+        </p:grpSpPr>
+        <p:sp>
+          <p:nvSpPr>
+            <p:cNvPr id="5" name="TextBox 4">
+              <a:extLst>
+                <a:ext uri="{FF2B5EF4-FFF2-40B4-BE49-F238E27FC236}">
+                  <a16:creationId xmlns:a16="http://schemas.microsoft.com/office/drawing/2014/main" id="{69D33968-85CD-4F32-6D5C-40C83C03FF9D}"/>
+                </a:ext>
+              </a:extLst>
+            </p:cNvPr>
+            <p:cNvSpPr txBox="1"/>
+            <p:nvPr/>
+          </p:nvSpPr>
+          <p:spPr>
+            <a:xfrm>
+              <a:off x="6570616" y="1885404"/>
+              <a:ext cx="5151119" cy="1361411"/>
+            </a:xfrm>
+            <a:prstGeom prst="rect">
+              <a:avLst/>
+            </a:prstGeom>
+            <a:noFill/>
+          </p:spPr>
+          <p:txBody>
+            <a:bodyPr wrap="square" rtlCol="0">
+              <a:spAutoFit/>
+            </a:bodyPr>
+            <a:lstStyle/>
+            <a:p>
+              <a:pPr algn="just"/>
+              <a:r>
+                <a:rPr lang="vi-VN" dirty="0">
+                  <a:solidFill>
+                    <a:schemeClr val="bg1"/>
+                  </a:solidFill>
+                </a:rPr>
+                <a:t>Tạo/Hủy xe </a:t>
+              </a:r>
+              <a:r>
+                <a:rPr lang="vi-VN" dirty="0" err="1">
+                  <a:solidFill>
+                    <a:schemeClr val="bg1"/>
+                  </a:solidFill>
+                </a:rPr>
+                <a:t>unity</a:t>
+              </a:r>
+              <a:r>
+                <a:rPr lang="vi-VN" dirty="0">
+                  <a:solidFill>
+                    <a:schemeClr val="bg1"/>
+                  </a:solidFill>
+                </a:rPr>
+                <a:t> khi nhấn vào</a:t>
+              </a:r>
+            </a:p>
+          </p:txBody>
+        </p:sp>
+        <p:sp>
+          <p:nvSpPr>
+            <p:cNvPr id="6" name="Speech Bubble: Rectangle 5">
+              <a:extLst>
+                <a:ext uri="{FF2B5EF4-FFF2-40B4-BE49-F238E27FC236}">
+                  <a16:creationId xmlns:a16="http://schemas.microsoft.com/office/drawing/2014/main" id="{3708F975-6B23-24C8-E23F-EC80758CBB5C}"/>
+                </a:ext>
+              </a:extLst>
+            </p:cNvPr>
+            <p:cNvSpPr/>
+            <p:nvPr/>
+          </p:nvSpPr>
+          <p:spPr>
+            <a:xfrm rot="10800000">
+              <a:off x="6570616" y="1885404"/>
+              <a:ext cx="5310292" cy="3025262"/>
+            </a:xfrm>
+            <a:prstGeom prst="wedgeRectCallout">
+              <a:avLst>
+                <a:gd name="adj1" fmla="val -24513"/>
+                <a:gd name="adj2" fmla="val -89431"/>
+              </a:avLst>
+            </a:prstGeom>
+            <a:noFill/>
+            <a:ln>
+              <a:solidFill>
+                <a:schemeClr val="bg1"/>
+              </a:solidFill>
+            </a:ln>
+          </p:spPr>
+          <p:style>
+            <a:lnRef idx="2">
+              <a:schemeClr val="accent1">
+                <a:shade val="15000"/>
+              </a:schemeClr>
+            </a:lnRef>
+            <a:fillRef idx="1">
+              <a:schemeClr val="accent1"/>
+            </a:fillRef>
+            <a:effectRef idx="0">
+              <a:schemeClr val="accent1"/>
+            </a:effectRef>
+            <a:fontRef idx="minor">
+              <a:schemeClr val="lt1"/>
+            </a:fontRef>
+          </p:style>
+          <p:txBody>
+            <a:bodyPr rtlCol="0" anchor="ctr"/>
+            <a:lstStyle/>
+            <a:p>
+              <a:pPr algn="ctr"/>
+              <a:endParaRPr lang="vi-VN" dirty="0"/>
+            </a:p>
+          </p:txBody>
+        </p:sp>
+      </p:grpSp>
+      <p:grpSp>
+        <p:nvGrpSpPr>
+          <p:cNvPr id="8" name="Group 7">
+            <a:extLst>
+              <a:ext uri="{FF2B5EF4-FFF2-40B4-BE49-F238E27FC236}">
+                <a16:creationId xmlns:a16="http://schemas.microsoft.com/office/drawing/2014/main" id="{F6D352EA-6133-F0EF-1D15-2C2370084315}"/>
+              </a:ext>
+            </a:extLst>
+          </p:cNvPr>
+          <p:cNvGrpSpPr/>
+          <p:nvPr/>
+        </p:nvGrpSpPr>
+        <p:grpSpPr>
+          <a:xfrm>
+            <a:off x="8870262" y="2869660"/>
+            <a:ext cx="3213100" cy="1769158"/>
+            <a:chOff x="6570616" y="1885404"/>
+            <a:chExt cx="5310292" cy="3686906"/>
+          </a:xfrm>
+        </p:grpSpPr>
+        <p:sp>
+          <p:nvSpPr>
+            <p:cNvPr id="9" name="TextBox 8">
+              <a:extLst>
+                <a:ext uri="{FF2B5EF4-FFF2-40B4-BE49-F238E27FC236}">
+                  <a16:creationId xmlns:a16="http://schemas.microsoft.com/office/drawing/2014/main" id="{F613A258-ED70-545D-1409-9E89C75DBE74}"/>
+                </a:ext>
+              </a:extLst>
+            </p:cNvPr>
+            <p:cNvSpPr txBox="1"/>
+            <p:nvPr/>
+          </p:nvSpPr>
+          <p:spPr>
+            <a:xfrm>
+              <a:off x="6570616" y="1885404"/>
+              <a:ext cx="5151119" cy="3686906"/>
+            </a:xfrm>
+            <a:prstGeom prst="rect">
+              <a:avLst/>
+            </a:prstGeom>
+            <a:noFill/>
+          </p:spPr>
+          <p:txBody>
+            <a:bodyPr wrap="square" rtlCol="0">
+              <a:spAutoFit/>
+            </a:bodyPr>
+            <a:lstStyle/>
+            <a:p>
+              <a:pPr algn="just"/>
+              <a:r>
+                <a:rPr lang="vi-VN" dirty="0">
+                  <a:solidFill>
+                    <a:schemeClr val="bg1"/>
+                  </a:solidFill>
+                </a:rPr>
+                <a:t>Danh sách người/xe đang tồn tại, nhấn vào nút chứa </a:t>
+              </a:r>
+              <a:r>
+                <a:rPr lang="vi-VN" dirty="0" err="1">
+                  <a:solidFill>
+                    <a:schemeClr val="bg1"/>
+                  </a:solidFill>
+                </a:rPr>
+                <a:t>id</a:t>
+              </a:r>
+              <a:r>
+                <a:rPr lang="vi-VN" dirty="0">
+                  <a:solidFill>
+                    <a:schemeClr val="bg1"/>
+                  </a:solidFill>
+                </a:rPr>
+                <a:t> nào sẽ gắn </a:t>
+              </a:r>
+              <a:r>
+                <a:rPr lang="vi-VN" dirty="0" err="1">
+                  <a:solidFill>
+                    <a:schemeClr val="bg1"/>
+                  </a:solidFill>
+                </a:rPr>
+                <a:t>camera</a:t>
+              </a:r>
+              <a:r>
+                <a:rPr lang="vi-VN" dirty="0">
+                  <a:solidFill>
+                    <a:schemeClr val="bg1"/>
+                  </a:solidFill>
+                </a:rPr>
+                <a:t> vào người/xe có </a:t>
+              </a:r>
+              <a:r>
+                <a:rPr lang="vi-VN" dirty="0" err="1">
+                  <a:solidFill>
+                    <a:schemeClr val="bg1"/>
+                  </a:solidFill>
+                </a:rPr>
+                <a:t>id</a:t>
+              </a:r>
+              <a:r>
+                <a:rPr lang="vi-VN" dirty="0">
+                  <a:solidFill>
+                    <a:schemeClr val="bg1"/>
+                  </a:solidFill>
+                </a:rPr>
+                <a:t> đó, nút “người/xe” để ẩn/hiện danh sách</a:t>
+              </a:r>
+            </a:p>
+          </p:txBody>
+        </p:sp>
+        <p:sp>
+          <p:nvSpPr>
+            <p:cNvPr id="10" name="Speech Bubble: Rectangle 9">
+              <a:extLst>
+                <a:ext uri="{FF2B5EF4-FFF2-40B4-BE49-F238E27FC236}">
+                  <a16:creationId xmlns:a16="http://schemas.microsoft.com/office/drawing/2014/main" id="{29BEA503-260B-0491-21F2-322BCD25F536}"/>
+                </a:ext>
+              </a:extLst>
+            </p:cNvPr>
+            <p:cNvSpPr/>
+            <p:nvPr/>
+          </p:nvSpPr>
+          <p:spPr>
+            <a:xfrm rot="10800000">
+              <a:off x="6570616" y="1885404"/>
+              <a:ext cx="5310292" cy="3025262"/>
+            </a:xfrm>
+            <a:prstGeom prst="wedgeRectCallout">
+              <a:avLst>
+                <a:gd name="adj1" fmla="val -32082"/>
+                <a:gd name="adj2" fmla="val -70668"/>
+              </a:avLst>
+            </a:prstGeom>
+            <a:noFill/>
+            <a:ln>
+              <a:solidFill>
+                <a:schemeClr val="bg1"/>
+              </a:solidFill>
+            </a:ln>
+          </p:spPr>
+          <p:style>
+            <a:lnRef idx="2">
+              <a:schemeClr val="accent1">
+                <a:shade val="15000"/>
+              </a:schemeClr>
+            </a:lnRef>
+            <a:fillRef idx="1">
+              <a:schemeClr val="accent1"/>
+            </a:fillRef>
+            <a:effectRef idx="0">
+              <a:schemeClr val="accent1"/>
+            </a:effectRef>
+            <a:fontRef idx="minor">
+              <a:schemeClr val="lt1"/>
+            </a:fontRef>
+          </p:style>
+          <p:txBody>
+            <a:bodyPr rtlCol="0" anchor="ctr"/>
+            <a:lstStyle/>
+            <a:p>
+              <a:pPr algn="ctr"/>
+              <a:endParaRPr lang="vi-VN" dirty="0"/>
+            </a:p>
+          </p:txBody>
+        </p:sp>
+      </p:grpSp>
+    </p:spTree>
+    <p:extLst>
+      <p:ext uri="{BB962C8B-B14F-4D97-AF65-F5344CB8AC3E}">
+        <p14:creationId xmlns:p14="http://schemas.microsoft.com/office/powerpoint/2010/main" val="4271785880"/>
+      </p:ext>
+    </p:extLst>
+  </p:cSld>
+  <p:clrMapOvr>
+    <a:masterClrMapping/>
+  </p:clrMapOvr>
+</p:sld>
+</file>
+
+<file path=ppt/slides/slide4.xml><?xml version="1.0" encoding="utf-8"?>
+<p:sld xmlns:a="http://schemas.openxmlformats.org/drawingml/2006/main" xmlns:r="http://schemas.openxmlformats.org/officeDocument/2006/relationships" xmlns:p="http://schemas.openxmlformats.org/presentationml/2006/main">
+  <p:cSld>
     <p:spTree>
       <p:nvGrpSpPr>
         <p:cNvPr id="1" name=""/>
@@ -4878,6 +5221,522 @@
 </p:sld>
 </file>
 
+<file path=ppt/slides/slide5.xml><?xml version="1.0" encoding="utf-8"?>
+<p:sld xmlns:a="http://schemas.openxmlformats.org/drawingml/2006/main" xmlns:r="http://schemas.openxmlformats.org/officeDocument/2006/relationships" xmlns:p="http://schemas.openxmlformats.org/presentationml/2006/main">
+  <p:cSld>
+    <p:bg>
+      <p:bgPr>
+        <a:solidFill>
+          <a:schemeClr val="bg1"/>
+        </a:solidFill>
+        <a:effectLst/>
+      </p:bgPr>
+    </p:bg>
+    <p:spTree>
+      <p:nvGrpSpPr>
+        <p:cNvPr id="1" name="">
+          <a:extLst>
+            <a:ext uri="{FF2B5EF4-FFF2-40B4-BE49-F238E27FC236}">
+              <a16:creationId xmlns:a16="http://schemas.microsoft.com/office/drawing/2014/main" id="{3E3761ED-36A7-7FB8-30D4-1309E0EF0544}"/>
+            </a:ext>
+          </a:extLst>
+        </p:cNvPr>
+        <p:cNvGrpSpPr/>
+        <p:nvPr/>
+      </p:nvGrpSpPr>
+      <p:grpSpPr>
+        <a:xfrm>
+          <a:off x="0" y="0"/>
+          <a:ext cx="0" cy="0"/>
+          <a:chOff x="0" y="0"/>
+          <a:chExt cx="0" cy="0"/>
+        </a:xfrm>
+      </p:grpSpPr>
+      <p:sp useBgFill="1">
+        <p:nvSpPr>
+          <p:cNvPr id="9" name="Rectangle 8">
+            <a:extLst>
+              <a:ext uri="{FF2B5EF4-FFF2-40B4-BE49-F238E27FC236}">
+                <a16:creationId xmlns:a16="http://schemas.microsoft.com/office/drawing/2014/main" id="{618F1C68-5B54-C135-07CC-1259159F4DA1}"/>
+              </a:ext>
+              <a:ext uri="{C183D7F6-B498-43B3-948B-1728B52AA6E4}">
+                <adec:decorative xmlns:adec="http://schemas.microsoft.com/office/drawing/2017/decorative" val="1"/>
+              </a:ext>
+            </a:extLst>
+          </p:cNvPr>
+          <p:cNvSpPr>
+            <a:spLocks noGrp="1" noRot="1" noChangeAspect="1" noMove="1" noResize="1" noEditPoints="1" noAdjustHandles="1" noChangeArrowheads="1" noChangeShapeType="1" noTextEdit="1"/>
+          </p:cNvSpPr>
+          <p:nvPr>
+            <p:extLst>
+              <p:ext uri="{386F3935-93C4-4BCD-93E2-E3B085C9AB24}">
+                <p16:designElem xmlns:p16="http://schemas.microsoft.com/office/powerpoint/2015/main" val="1"/>
+              </p:ext>
+            </p:extLst>
+          </p:nvPr>
+        </p:nvSpPr>
+        <p:spPr>
+          <a:xfrm>
+            <a:off x="0" y="-2"/>
+            <a:ext cx="12192000" cy="6858001"/>
+          </a:xfrm>
+          <a:prstGeom prst="rect">
+            <a:avLst/>
+          </a:prstGeom>
+          <a:ln>
+            <a:noFill/>
+          </a:ln>
+        </p:spPr>
+        <p:style>
+          <a:lnRef idx="2">
+            <a:schemeClr val="accent1">
+              <a:shade val="50000"/>
+            </a:schemeClr>
+          </a:lnRef>
+          <a:fillRef idx="1">
+            <a:schemeClr val="accent1"/>
+          </a:fillRef>
+          <a:effectRef idx="0">
+            <a:schemeClr val="accent1"/>
+          </a:effectRef>
+          <a:fontRef idx="minor">
+            <a:schemeClr val="lt1"/>
+          </a:fontRef>
+        </p:style>
+        <p:txBody>
+          <a:bodyPr rtlCol="0" anchor="ctr"/>
+          <a:lstStyle/>
+          <a:p>
+            <a:pPr algn="ctr"/>
+            <a:endParaRPr lang="en-US" dirty="0"/>
+          </a:p>
+        </p:txBody>
+      </p:sp>
+      <p:pic>
+        <p:nvPicPr>
+          <p:cNvPr id="4" name="Picture 3" descr="Top view of wood desk with the plant, white keyboard, coffee in a white mug, notebook, and pen">
+            <a:extLst>
+              <a:ext uri="{FF2B5EF4-FFF2-40B4-BE49-F238E27FC236}">
+                <a16:creationId xmlns:a16="http://schemas.microsoft.com/office/drawing/2014/main" id="{1E98B547-9A5B-DD4B-630C-5B53F26BEDF8}"/>
+              </a:ext>
+            </a:extLst>
+          </p:cNvPr>
+          <p:cNvPicPr>
+            <a:picLocks noChangeAspect="1"/>
+          </p:cNvPicPr>
+          <p:nvPr/>
+        </p:nvPicPr>
+        <p:blipFill>
+          <a:blip r:embed="rId2">
+            <a:alphaModFix amt="40000"/>
+          </a:blip>
+          <a:srcRect t="1799" b="15175"/>
+          <a:stretch/>
+        </p:blipFill>
+        <p:spPr>
+          <a:xfrm>
+            <a:off x="-2" y="-2"/>
+            <a:ext cx="12192001" cy="6858001"/>
+          </a:xfrm>
+          <a:prstGeom prst="rect">
+            <a:avLst/>
+          </a:prstGeom>
+        </p:spPr>
+      </p:pic>
+      <p:sp>
+        <p:nvSpPr>
+          <p:cNvPr id="2" name="Title 1">
+            <a:extLst>
+              <a:ext uri="{FF2B5EF4-FFF2-40B4-BE49-F238E27FC236}">
+                <a16:creationId xmlns:a16="http://schemas.microsoft.com/office/drawing/2014/main" id="{90833E70-312B-A909-EF26-FF3E9C399B79}"/>
+              </a:ext>
+            </a:extLst>
+          </p:cNvPr>
+          <p:cNvSpPr>
+            <a:spLocks noGrp="1"/>
+          </p:cNvSpPr>
+          <p:nvPr>
+            <p:ph type="ctrTitle"/>
+          </p:nvPr>
+        </p:nvSpPr>
+        <p:spPr>
+          <a:xfrm>
+            <a:off x="517870" y="978407"/>
+            <a:ext cx="5021182" cy="3290107"/>
+          </a:xfrm>
+        </p:spPr>
+        <p:txBody>
+          <a:bodyPr anchor="t">
+            <a:normAutofit/>
+          </a:bodyPr>
+          <a:lstStyle/>
+          <a:p>
+            <a:r>
+              <a:rPr lang="vi-VN" sz="6000" dirty="0">
+                <a:solidFill>
+                  <a:srgbClr val="FFFFFF"/>
+                </a:solidFill>
+              </a:rPr>
+              <a:t>Từ SUMO tới </a:t>
+            </a:r>
+            <a:r>
+              <a:rPr lang="vi-VN" sz="6000" dirty="0" err="1">
+                <a:solidFill>
+                  <a:srgbClr val="FFFFFF"/>
+                </a:solidFill>
+              </a:rPr>
+              <a:t>Unity</a:t>
+            </a:r>
+            <a:endParaRPr lang="vi-VN" sz="6000" dirty="0">
+              <a:solidFill>
+                <a:srgbClr val="FFFFFF"/>
+              </a:solidFill>
+            </a:endParaRPr>
+          </a:p>
+        </p:txBody>
+      </p:sp>
+      <p:sp>
+        <p:nvSpPr>
+          <p:cNvPr id="11" name="Rectangle 10">
+            <a:extLst>
+              <a:ext uri="{FF2B5EF4-FFF2-40B4-BE49-F238E27FC236}">
+                <a16:creationId xmlns:a16="http://schemas.microsoft.com/office/drawing/2014/main" id="{24DB888E-9DCD-108F-F626-23B0F6B8BCCA}"/>
+              </a:ext>
+              <a:ext uri="{C183D7F6-B498-43B3-948B-1728B52AA6E4}">
+                <adec:decorative xmlns:adec="http://schemas.microsoft.com/office/drawing/2017/decorative" val="1"/>
+              </a:ext>
+            </a:extLst>
+          </p:cNvPr>
+          <p:cNvSpPr>
+            <a:spLocks noGrp="1" noRot="1" noChangeAspect="1" noMove="1" noResize="1" noEditPoints="1" noAdjustHandles="1" noChangeArrowheads="1" noChangeShapeType="1" noTextEdit="1"/>
+          </p:cNvSpPr>
+          <p:nvPr>
+            <p:extLst>
+              <p:ext uri="{386F3935-93C4-4BCD-93E2-E3B085C9AB24}">
+                <p16:designElem xmlns:p16="http://schemas.microsoft.com/office/powerpoint/2015/main" val="1"/>
+              </p:ext>
+            </p:extLst>
+          </p:nvPr>
+        </p:nvSpPr>
+        <p:spPr>
+          <a:xfrm>
+            <a:off x="517870" y="508090"/>
+            <a:ext cx="5021183" cy="149279"/>
+          </a:xfrm>
+          <a:prstGeom prst="rect">
+            <a:avLst/>
+          </a:prstGeom>
+          <a:solidFill>
+            <a:srgbClr val="FFFFFF"/>
+          </a:solidFill>
+          <a:ln>
+            <a:noFill/>
+          </a:ln>
+        </p:spPr>
+        <p:style>
+          <a:lnRef idx="2">
+            <a:schemeClr val="accent1">
+              <a:shade val="50000"/>
+            </a:schemeClr>
+          </a:lnRef>
+          <a:fillRef idx="1">
+            <a:schemeClr val="accent1"/>
+          </a:fillRef>
+          <a:effectRef idx="0">
+            <a:schemeClr val="accent1"/>
+          </a:effectRef>
+          <a:fontRef idx="minor">
+            <a:schemeClr val="lt1"/>
+          </a:fontRef>
+        </p:style>
+        <p:txBody>
+          <a:bodyPr rtlCol="0" anchor="ctr"/>
+          <a:lstStyle/>
+          <a:p>
+            <a:pPr algn="ctr"/>
+            <a:endParaRPr lang="en-US"/>
+          </a:p>
+        </p:txBody>
+      </p:sp>
+    </p:spTree>
+    <p:extLst>
+      <p:ext uri="{BB962C8B-B14F-4D97-AF65-F5344CB8AC3E}">
+        <p14:creationId xmlns:p14="http://schemas.microsoft.com/office/powerpoint/2010/main" val="3698322431"/>
+      </p:ext>
+    </p:extLst>
+  </p:cSld>
+  <p:clrMapOvr>
+    <a:overrideClrMapping bg1="dk1" tx1="lt1" bg2="dk2" tx2="lt2" accent1="accent1" accent2="accent2" accent3="accent3" accent4="accent4" accent5="accent5" accent6="accent6" hlink="hlink" folHlink="folHlink"/>
+  </p:clrMapOvr>
+</p:sld>
+</file>
+
+<file path=ppt/slides/slide6.xml><?xml version="1.0" encoding="utf-8"?>
+<p:sld xmlns:a="http://schemas.openxmlformats.org/drawingml/2006/main" xmlns:r="http://schemas.openxmlformats.org/officeDocument/2006/relationships" xmlns:p="http://schemas.openxmlformats.org/presentationml/2006/main">
+  <p:cSld>
+    <p:bg>
+      <p:bgPr>
+        <a:solidFill>
+          <a:schemeClr val="bg1"/>
+        </a:solidFill>
+        <a:effectLst/>
+      </p:bgPr>
+    </p:bg>
+    <p:spTree>
+      <p:nvGrpSpPr>
+        <p:cNvPr id="1" name="">
+          <a:extLst>
+            <a:ext uri="{FF2B5EF4-FFF2-40B4-BE49-F238E27FC236}">
+              <a16:creationId xmlns:a16="http://schemas.microsoft.com/office/drawing/2014/main" id="{ACC234D6-8FA2-C653-D282-65B0E33FE649}"/>
+            </a:ext>
+          </a:extLst>
+        </p:cNvPr>
+        <p:cNvGrpSpPr/>
+        <p:nvPr/>
+      </p:nvGrpSpPr>
+      <p:grpSpPr>
+        <a:xfrm>
+          <a:off x="0" y="0"/>
+          <a:ext cx="0" cy="0"/>
+          <a:chOff x="0" y="0"/>
+          <a:chExt cx="0" cy="0"/>
+        </a:xfrm>
+      </p:grpSpPr>
+      <p:sp useBgFill="1">
+        <p:nvSpPr>
+          <p:cNvPr id="9" name="Rectangle 8">
+            <a:extLst>
+              <a:ext uri="{FF2B5EF4-FFF2-40B4-BE49-F238E27FC236}">
+                <a16:creationId xmlns:a16="http://schemas.microsoft.com/office/drawing/2014/main" id="{B62A9CA2-BD12-0347-72FF-8A83F0858079}"/>
+              </a:ext>
+              <a:ext uri="{C183D7F6-B498-43B3-948B-1728B52AA6E4}">
+                <adec:decorative xmlns:adec="http://schemas.microsoft.com/office/drawing/2017/decorative" val="1"/>
+              </a:ext>
+            </a:extLst>
+          </p:cNvPr>
+          <p:cNvSpPr>
+            <a:spLocks noGrp="1" noRot="1" noChangeAspect="1" noMove="1" noResize="1" noEditPoints="1" noAdjustHandles="1" noChangeArrowheads="1" noChangeShapeType="1" noTextEdit="1"/>
+          </p:cNvSpPr>
+          <p:nvPr>
+            <p:extLst>
+              <p:ext uri="{386F3935-93C4-4BCD-93E2-E3B085C9AB24}">
+                <p16:designElem xmlns:p16="http://schemas.microsoft.com/office/powerpoint/2015/main" val="1"/>
+              </p:ext>
+            </p:extLst>
+          </p:nvPr>
+        </p:nvSpPr>
+        <p:spPr>
+          <a:xfrm>
+            <a:off x="0" y="-2"/>
+            <a:ext cx="12192000" cy="6858001"/>
+          </a:xfrm>
+          <a:prstGeom prst="rect">
+            <a:avLst/>
+          </a:prstGeom>
+          <a:ln>
+            <a:noFill/>
+          </a:ln>
+        </p:spPr>
+        <p:style>
+          <a:lnRef idx="2">
+            <a:schemeClr val="accent1">
+              <a:shade val="50000"/>
+            </a:schemeClr>
+          </a:lnRef>
+          <a:fillRef idx="1">
+            <a:schemeClr val="accent1"/>
+          </a:fillRef>
+          <a:effectRef idx="0">
+            <a:schemeClr val="accent1"/>
+          </a:effectRef>
+          <a:fontRef idx="minor">
+            <a:schemeClr val="lt1"/>
+          </a:fontRef>
+        </p:style>
+        <p:txBody>
+          <a:bodyPr rtlCol="0" anchor="ctr"/>
+          <a:lstStyle/>
+          <a:p>
+            <a:pPr algn="ctr"/>
+            <a:endParaRPr lang="en-US" dirty="0"/>
+          </a:p>
+        </p:txBody>
+      </p:sp>
+      <p:pic>
+        <p:nvPicPr>
+          <p:cNvPr id="4" name="Picture 3" descr="Top view of wood desk with the plant, white keyboard, coffee in a white mug, notebook, and pen">
+            <a:extLst>
+              <a:ext uri="{FF2B5EF4-FFF2-40B4-BE49-F238E27FC236}">
+                <a16:creationId xmlns:a16="http://schemas.microsoft.com/office/drawing/2014/main" id="{2C2EA178-8117-9820-9EBA-C199E4853441}"/>
+              </a:ext>
+            </a:extLst>
+          </p:cNvPr>
+          <p:cNvPicPr>
+            <a:picLocks noChangeAspect="1"/>
+          </p:cNvPicPr>
+          <p:nvPr/>
+        </p:nvPicPr>
+        <p:blipFill>
+          <a:blip r:embed="rId2">
+            <a:alphaModFix amt="40000"/>
+          </a:blip>
+          <a:srcRect t="1799" b="15175"/>
+          <a:stretch/>
+        </p:blipFill>
+        <p:spPr>
+          <a:xfrm>
+            <a:off x="-2" y="-2"/>
+            <a:ext cx="12192001" cy="6858001"/>
+          </a:xfrm>
+          <a:prstGeom prst="rect">
+            <a:avLst/>
+          </a:prstGeom>
+        </p:spPr>
+      </p:pic>
+      <p:sp>
+        <p:nvSpPr>
+          <p:cNvPr id="2" name="Title 1">
+            <a:extLst>
+              <a:ext uri="{FF2B5EF4-FFF2-40B4-BE49-F238E27FC236}">
+                <a16:creationId xmlns:a16="http://schemas.microsoft.com/office/drawing/2014/main" id="{B3619628-E5F1-B1EB-FAA7-B6F407DB7A23}"/>
+              </a:ext>
+            </a:extLst>
+          </p:cNvPr>
+          <p:cNvSpPr>
+            <a:spLocks noGrp="1"/>
+          </p:cNvSpPr>
+          <p:nvPr>
+            <p:ph type="ctrTitle"/>
+          </p:nvPr>
+        </p:nvSpPr>
+        <p:spPr>
+          <a:xfrm>
+            <a:off x="517870" y="978407"/>
+            <a:ext cx="5021182" cy="3290107"/>
+          </a:xfrm>
+        </p:spPr>
+        <p:txBody>
+          <a:bodyPr anchor="t">
+            <a:normAutofit/>
+          </a:bodyPr>
+          <a:lstStyle/>
+          <a:p>
+            <a:r>
+              <a:rPr lang="vi-VN" sz="6000" dirty="0">
+                <a:solidFill>
+                  <a:srgbClr val="FFFFFF"/>
+                </a:solidFill>
+              </a:rPr>
+              <a:t>Từ </a:t>
+            </a:r>
+            <a:r>
+              <a:rPr lang="vi-VN" sz="6000" dirty="0" err="1">
+                <a:solidFill>
+                  <a:srgbClr val="FFFFFF"/>
+                </a:solidFill>
+              </a:rPr>
+              <a:t>Unity</a:t>
+            </a:r>
+            <a:r>
+              <a:rPr lang="vi-VN" sz="6000" dirty="0">
+                <a:solidFill>
+                  <a:srgbClr val="FFFFFF"/>
+                </a:solidFill>
+              </a:rPr>
+              <a:t> tới </a:t>
+            </a:r>
+            <a:r>
+              <a:rPr lang="vi-VN" sz="6000" dirty="0" err="1">
+                <a:solidFill>
+                  <a:srgbClr val="FFFFFF"/>
+                </a:solidFill>
+              </a:rPr>
+              <a:t>Sumo</a:t>
+            </a:r>
+            <a:endParaRPr lang="vi-VN" sz="6000" dirty="0">
+              <a:solidFill>
+                <a:srgbClr val="FFFFFF"/>
+              </a:solidFill>
+            </a:endParaRPr>
+          </a:p>
+        </p:txBody>
+      </p:sp>
+      <p:sp>
+        <p:nvSpPr>
+          <p:cNvPr id="11" name="Rectangle 10">
+            <a:extLst>
+              <a:ext uri="{FF2B5EF4-FFF2-40B4-BE49-F238E27FC236}">
+                <a16:creationId xmlns:a16="http://schemas.microsoft.com/office/drawing/2014/main" id="{73C7D764-0B7A-C43F-4198-5832A7B5AF48}"/>
+              </a:ext>
+              <a:ext uri="{C183D7F6-B498-43B3-948B-1728B52AA6E4}">
+                <adec:decorative xmlns:adec="http://schemas.microsoft.com/office/drawing/2017/decorative" val="1"/>
+              </a:ext>
+            </a:extLst>
+          </p:cNvPr>
+          <p:cNvSpPr>
+            <a:spLocks noGrp="1" noRot="1" noChangeAspect="1" noMove="1" noResize="1" noEditPoints="1" noAdjustHandles="1" noChangeArrowheads="1" noChangeShapeType="1" noTextEdit="1"/>
+          </p:cNvSpPr>
+          <p:nvPr>
+            <p:extLst>
+              <p:ext uri="{386F3935-93C4-4BCD-93E2-E3B085C9AB24}">
+                <p16:designElem xmlns:p16="http://schemas.microsoft.com/office/powerpoint/2015/main" val="1"/>
+              </p:ext>
+            </p:extLst>
+          </p:nvPr>
+        </p:nvSpPr>
+        <p:spPr>
+          <a:xfrm>
+            <a:off x="517870" y="508090"/>
+            <a:ext cx="5021183" cy="149279"/>
+          </a:xfrm>
+          <a:prstGeom prst="rect">
+            <a:avLst/>
+          </a:prstGeom>
+          <a:solidFill>
+            <a:srgbClr val="FFFFFF"/>
+          </a:solidFill>
+          <a:ln>
+            <a:noFill/>
+          </a:ln>
+        </p:spPr>
+        <p:style>
+          <a:lnRef idx="2">
+            <a:schemeClr val="accent1">
+              <a:shade val="50000"/>
+            </a:schemeClr>
+          </a:lnRef>
+          <a:fillRef idx="1">
+            <a:schemeClr val="accent1"/>
+          </a:fillRef>
+          <a:effectRef idx="0">
+            <a:schemeClr val="accent1"/>
+          </a:effectRef>
+          <a:fontRef idx="minor">
+            <a:schemeClr val="lt1"/>
+          </a:fontRef>
+        </p:style>
+        <p:txBody>
+          <a:bodyPr rtlCol="0" anchor="ctr"/>
+          <a:lstStyle/>
+          <a:p>
+            <a:pPr algn="ctr"/>
+            <a:endParaRPr lang="en-US"/>
+          </a:p>
+        </p:txBody>
+      </p:sp>
+    </p:spTree>
+    <p:extLst>
+      <p:ext uri="{BB962C8B-B14F-4D97-AF65-F5344CB8AC3E}">
+        <p14:creationId xmlns:p14="http://schemas.microsoft.com/office/powerpoint/2010/main" val="1379285986"/>
+      </p:ext>
+    </p:extLst>
+  </p:cSld>
+  <p:clrMapOvr>
+    <a:overrideClrMapping bg1="dk1" tx1="lt1" bg2="dk2" tx2="lt2" accent1="accent1" accent2="accent2" accent3="accent3" accent4="accent4" accent5="accent5" accent6="accent6" hlink="hlink" folHlink="folHlink"/>
+  </p:clrMapOvr>
+</p:sld>
+</file>
+
 <file path=ppt/theme/theme1.xml><?xml version="1.0" encoding="utf-8"?>
 <a:theme xmlns:a="http://schemas.openxmlformats.org/drawingml/2006/main" name="GestaltVTI">
   <a:themeElements>
